--- a/ppt/07.C언어-제어문_반복문.pptx
+++ b/ppt/07.C언어-제어문_반복문.pptx
@@ -1,6 +1,6 @@
 
 <file path=ppt/presentation.xml><?xml version="1.0" encoding="utf-8"?>
-<p:presentation xmlns:a="http://schemas.openxmlformats.org/drawingml/2006/main" xmlns:r="http://schemas.openxmlformats.org/officeDocument/2006/relationships" xmlns:p="http://schemas.openxmlformats.org/presentationml/2006/main" saveSubsetFonts="1">
+<p:presentation xmlns:a="http://schemas.openxmlformats.org/drawingml/2006/main" xmlns:r="http://schemas.openxmlformats.org/officeDocument/2006/relationships" xmlns:p="http://schemas.openxmlformats.org/presentationml/2006/main" embedTrueTypeFonts="1" saveSubsetFonts="1">
   <p:sldMasterIdLst>
     <p:sldMasterId id="2147483648" r:id="rId1"/>
   </p:sldMasterIdLst>
@@ -48,6 +48,27 @@
   </p:sldIdLst>
   <p:sldSz cx="9144000" cy="6858000" type="screen4x3"/>
   <p:notesSz cx="6858000" cy="9144000"/>
+  <p:embeddedFontLst>
+    <p:embeddedFont>
+      <p:font typeface="Adobe 고딕 Std B" panose="020B0800000000000000" pitchFamily="34" charset="-127"/>
+      <p:bold r:id="rId40"/>
+    </p:embeddedFont>
+    <p:embeddedFont>
+      <p:font typeface="Consolas" panose="020B0609020204030204" pitchFamily="49" charset="0"/>
+      <p:regular r:id="rId41"/>
+      <p:bold r:id="rId42"/>
+      <p:italic r:id="rId43"/>
+      <p:boldItalic r:id="rId44"/>
+    </p:embeddedFont>
+    <p:embeddedFont>
+      <p:font typeface="HY견고딕" panose="02030600000101010101" pitchFamily="18" charset="-127"/>
+      <p:regular r:id="rId45"/>
+    </p:embeddedFont>
+    <p:embeddedFont>
+      <p:font typeface="가을체" panose="02030600000101010101" pitchFamily="18" charset="-127"/>
+      <p:regular r:id="rId46"/>
+    </p:embeddedFont>
+  </p:embeddedFontLst>
   <p:defaultTextStyle>
     <a:defPPr>
       <a:defRPr lang="ko-KR"/>
@@ -18635,7 +18656,7 @@
         <p:spPr>
           <a:xfrm>
             <a:off x="4932040" y="2459504"/>
-            <a:ext cx="3960440" cy="1938992"/>
+            <a:ext cx="3960440" cy="1569660"/>
           </a:xfrm>
           <a:prstGeom prst="rect">
             <a:avLst/>
@@ -18725,35 +18746,26 @@
               <a:t>;</a:t>
             </a:r>
             <a:br>
-              <a:rPr lang="en-US" altLang="ko-KR" sz="2400" b="0" i="0" u="none" strike="noStrike" dirty="0">
-                <a:solidFill>
-                  <a:srgbClr val="383A42"/>
-                </a:solidFill>
-                <a:effectLst/>
-                <a:latin typeface="Consolas" panose="020B0609020204030204" pitchFamily="49" charset="0"/>
-              </a:rPr>
-            </a:br>
-            <a:r>
-              <a:rPr lang="en-US" altLang="ko-KR" sz="2400" b="0" i="0" u="none" strike="noStrike" dirty="0">
-                <a:solidFill>
-                  <a:srgbClr val="383A42"/>
-                </a:solidFill>
-                <a:effectLst/>
-                <a:latin typeface="Consolas" panose="020B0609020204030204" pitchFamily="49" charset="0"/>
-              </a:rPr>
-              <a:t>}</a:t>
-            </a:r>
-            <a:br>
-              <a:rPr lang="en-US" altLang="ko-KR" sz="2400" b="0" i="0" u="none" strike="noStrike" dirty="0">
-                <a:solidFill>
-                  <a:srgbClr val="383A42"/>
-                </a:solidFill>
-                <a:effectLst/>
-                <a:latin typeface="Consolas" panose="020B0609020204030204" pitchFamily="49" charset="0"/>
-              </a:rPr>
-            </a:br>
-            <a:r>
-              <a:rPr lang="en-US" altLang="ko-KR" sz="2400" b="0" i="0" u="none" strike="noStrike" dirty="0">
+              <a:rPr lang="en-US" altLang="ko-KR" sz="2400" b="0" i="0" u="none" strike="noStrike">
+                <a:solidFill>
+                  <a:srgbClr val="383A42"/>
+                </a:solidFill>
+                <a:effectLst/>
+                <a:latin typeface="Consolas" panose="020B0609020204030204" pitchFamily="49" charset="0"/>
+              </a:rPr>
+            </a:br>
+            <a:r>
+              <a:rPr lang="en-US" altLang="ko-KR" sz="2400" b="0" i="0" u="none" strike="noStrike">
+                <a:solidFill>
+                  <a:srgbClr val="383A42"/>
+                </a:solidFill>
+                <a:effectLst/>
+                <a:latin typeface="Consolas" panose="020B0609020204030204" pitchFamily="49" charset="0"/>
+              </a:rPr>
+              <a:t>} </a:t>
+            </a:r>
+            <a:r>
+              <a:rPr lang="en-US" altLang="ko-KR" sz="2400" b="0" i="0" u="none" strike="noStrike">
                 <a:solidFill>
                   <a:srgbClr val="A626A4"/>
                 </a:solidFill>
@@ -18953,7 +18965,7 @@
         <p:spPr>
           <a:xfrm>
             <a:off x="539750" y="1268760"/>
-            <a:ext cx="8064698" cy="5016758"/>
+            <a:ext cx="8064698" cy="4708981"/>
           </a:xfrm>
           <a:prstGeom prst="rect">
             <a:avLst/>
@@ -19362,17 +19374,18 @@
                 <a:effectLst/>
                 <a:latin typeface="Consolas" panose="020B0609020204030204" pitchFamily="49" charset="0"/>
               </a:rPr>
-              <a:t>    }</a:t>
-            </a:r>
-            <a:br>
+              <a:t>    } </a:t>
+            </a:r>
+            <a:r>
               <a:rPr lang="en-US" altLang="ko-KR" sz="2000" b="0" i="0" u="none" strike="noStrike" dirty="0">
                 <a:solidFill>
-                  <a:srgbClr val="383A42"/>
-                </a:solidFill>
-                <a:effectLst/>
-                <a:latin typeface="Consolas" panose="020B0609020204030204" pitchFamily="49" charset="0"/>
-              </a:rPr>
-            </a:br>
+                  <a:srgbClr val="A626A4"/>
+                </a:solidFill>
+                <a:effectLst/>
+                <a:latin typeface="Consolas" panose="020B0609020204030204" pitchFamily="49" charset="0"/>
+              </a:rPr>
+              <a:t>while</a:t>
+            </a:r>
             <a:r>
               <a:rPr lang="en-US" altLang="ko-KR" sz="2000" b="0" i="0" u="none" strike="noStrike" dirty="0">
                 <a:solidFill>
@@ -19381,17 +19394,17 @@
                 <a:effectLst/>
                 <a:latin typeface="Consolas" panose="020B0609020204030204" pitchFamily="49" charset="0"/>
               </a:rPr>
-              <a:t>    </a:t>
+              <a:t> (</a:t>
             </a:r>
             <a:r>
               <a:rPr lang="en-US" altLang="ko-KR" sz="2000" b="0" i="0" u="none" strike="noStrike" dirty="0">
                 <a:solidFill>
-                  <a:srgbClr val="A626A4"/>
-                </a:solidFill>
-                <a:effectLst/>
-                <a:latin typeface="Consolas" panose="020B0609020204030204" pitchFamily="49" charset="0"/>
-              </a:rPr>
-              <a:t>while</a:t>
+                  <a:srgbClr val="986801"/>
+                </a:solidFill>
+                <a:effectLst/>
+                <a:latin typeface="Consolas" panose="020B0609020204030204" pitchFamily="49" charset="0"/>
+              </a:rPr>
+              <a:t>0 </a:t>
             </a:r>
             <a:r>
               <a:rPr lang="en-US" altLang="ko-KR" sz="2000" b="0" i="0" u="none" strike="noStrike" dirty="0">
@@ -19401,27 +19414,7 @@
                 <a:effectLst/>
                 <a:latin typeface="Consolas" panose="020B0609020204030204" pitchFamily="49" charset="0"/>
               </a:rPr>
-              <a:t> (value &lt; </a:t>
-            </a:r>
-            <a:r>
-              <a:rPr lang="en-US" altLang="ko-KR" sz="2000" b="0" i="0" u="none" strike="noStrike" dirty="0">
-                <a:solidFill>
-                  <a:srgbClr val="986801"/>
-                </a:solidFill>
-                <a:effectLst/>
-                <a:latin typeface="Consolas" panose="020B0609020204030204" pitchFamily="49" charset="0"/>
-              </a:rPr>
-              <a:t>0</a:t>
-            </a:r>
-            <a:r>
-              <a:rPr lang="en-US" altLang="ko-KR" sz="2000" b="0" i="0" u="none" strike="noStrike" dirty="0">
-                <a:solidFill>
-                  <a:srgbClr val="383A42"/>
-                </a:solidFill>
-                <a:effectLst/>
-                <a:latin typeface="Consolas" panose="020B0609020204030204" pitchFamily="49" charset="0"/>
-              </a:rPr>
-              <a:t>);</a:t>
+              <a:t>&lt;= value);</a:t>
             </a:r>
             <a:br>
               <a:rPr lang="en-US" altLang="ko-KR" sz="2000" b="0" i="0" u="none" strike="noStrike" dirty="0">
@@ -22286,7 +22279,7 @@
             <a:pPr lvl="1"/>
             <a:r>
               <a:rPr lang="en-US" altLang="ko-KR" sz="1800" dirty="0"/>
-              <a:t>For : </a:t>
+              <a:t>for : </a:t>
             </a:r>
             <a:r>
               <a:rPr lang="ko-KR" altLang="en-US" sz="1800" dirty="0"/>
@@ -30886,7 +30879,7 @@
             <a:pPr lvl="1"/>
             <a:r>
               <a:rPr lang="en-US" altLang="ko-KR" sz="1600" dirty="0"/>
-              <a:t>Goto:</a:t>
+              <a:t>goto:</a:t>
             </a:r>
             <a:r>
               <a:rPr lang="ko-KR" altLang="en-US" sz="1600" dirty="0"/>
